--- a/실습5/day3_how.pptx
+++ b/실습5/day3_how.pptx
@@ -3266,7 +3266,7 @@
         <p:spPr>
           <a:xfrm>
             <a:off x="566928" y="1572768"/>
-            <a:ext cx="3611880" cy="4343400"/>
+            <a:ext cx="3611880" cy="4462272"/>
           </a:xfrm>
           <a:prstGeom prst="roundRect">
             <a:avLst>
@@ -3990,7 +3990,7 @@
         <p:spPr>
           <a:xfrm>
             <a:off x="4361688" y="1572768"/>
-            <a:ext cx="3611880" cy="4343400"/>
+            <a:ext cx="3611880" cy="4462272"/>
           </a:xfrm>
           <a:prstGeom prst="roundRect">
             <a:avLst>
@@ -4579,7 +4579,7 @@
         <p:spPr>
           <a:xfrm>
             <a:off x="8156448" y="1572768"/>
-            <a:ext cx="3611880" cy="4343400"/>
+            <a:ext cx="3611880" cy="4462272"/>
           </a:xfrm>
           <a:prstGeom prst="roundRect">
             <a:avLst>

--- a/실습5/day3_how.pptx
+++ b/실습5/day3_how.pptx
@@ -3265,8 +3265,8 @@
         </p:nvSpPr>
         <p:spPr>
           <a:xfrm>
-            <a:off x="566928" y="1572768"/>
-            <a:ext cx="3611880" cy="4462272"/>
+            <a:off x="566928" y="2066543"/>
+            <a:ext cx="3611880" cy="4160520"/>
           </a:xfrm>
           <a:prstGeom prst="roundRect">
             <a:avLst>
@@ -3313,8 +3313,8 @@
         </p:nvSpPr>
         <p:spPr>
           <a:xfrm>
-            <a:off x="804672" y="1755648"/>
-            <a:ext cx="3611880" cy="274320"/>
+            <a:off x="786384" y="2212847"/>
+            <a:ext cx="3611880" cy="237744"/>
           </a:xfrm>
           <a:prstGeom prst="rect">
             <a:avLst/>
@@ -3333,7 +3333,7 @@
               </a:lnSpc>
             </a:pPr>
             <a:r>
-              <a:rPr sz="1100" b="1">
+              <a:rPr sz="1000" b="1">
                 <a:solidFill>
                   <a:srgbClr val="0B6E5E"/>
                 </a:solidFill>
@@ -3352,8 +3352,8 @@
         </p:nvSpPr>
         <p:spPr>
           <a:xfrm>
-            <a:off x="804672" y="1975104"/>
-            <a:ext cx="3154680" cy="365760"/>
+            <a:off x="786384" y="2414015"/>
+            <a:ext cx="3172968" cy="310896"/>
           </a:xfrm>
           <a:prstGeom prst="rect">
             <a:avLst/>
@@ -3372,7 +3372,7 @@
               </a:lnSpc>
             </a:pPr>
             <a:r>
-              <a:rPr sz="1900" b="1">
+              <a:rPr sz="1600" b="1">
                 <a:solidFill>
                   <a:srgbClr val="131A19"/>
                 </a:solidFill>
@@ -3391,8 +3391,8 @@
         </p:nvSpPr>
         <p:spPr>
           <a:xfrm>
-            <a:off x="804672" y="2359152"/>
-            <a:ext cx="3154680" cy="274320"/>
+            <a:off x="786384" y="2724911"/>
+            <a:ext cx="3172968" cy="219456"/>
           </a:xfrm>
           <a:prstGeom prst="rect">
             <a:avLst/>
@@ -3411,13 +3411,13 @@
               </a:lnSpc>
             </a:pPr>
             <a:r>
-              <a:rPr sz="1100" b="0">
+              <a:rPr sz="1000" b="0">
                 <a:solidFill>
                   <a:srgbClr val="66756F"/>
                 </a:solidFill>
                 <a:latin typeface="맑은 고딕"/>
               </a:rPr>
-              <a:t>정규화·크롭 없음. 쌍을 만든다</a:t>
+              <a:t>정규화·크롭 없음 — 쌍을 만든다</a:t>
             </a:r>
           </a:p>
         </p:txBody>
@@ -3430,8 +3430,8 @@
         </p:nvSpPr>
         <p:spPr>
           <a:xfrm>
-            <a:off x="804672" y="2724912"/>
-            <a:ext cx="3154680" cy="310896"/>
+            <a:off x="786384" y="2999231"/>
+            <a:ext cx="3172968" cy="3063240"/>
           </a:xfrm>
           <a:prstGeom prst="rect">
             <a:avLst/>
@@ -3444,13 +3444,16 @@
           </a:bodyPr>
           <a:lstStyle/>
           <a:p>
-            <a:pPr algn="l">
-              <a:lnSpc>
-                <a:spcPct val="112000"/>
-              </a:lnSpc>
-            </a:pPr>
-            <a:r>
-              <a:rPr sz="1050" b="0">
+            <a:pPr>
+              <a:lnSpc>
+                <a:spcPct val="122000"/>
+              </a:lnSpc>
+              <a:spcBef>
+                <a:spcPts val="200"/>
+              </a:spcBef>
+            </a:pPr>
+            <a:r>
+              <a:rPr sz="950" b="0">
                 <a:solidFill>
                   <a:srgbClr val="3C4947"/>
                 </a:solidFill>
@@ -3458,539 +3461,299 @@
               </a:rPr>
               <a:t>깨끗한 이미지 </a:t>
             </a:r>
-          </a:p>
-          <a:p>
-            <a:pPr algn="l">
-              <a:lnSpc>
-                <a:spcPct val="112000"/>
-              </a:lnSpc>
-            </a:pPr>
-            <a:r>
-              <a:rPr sz="1050" b="1">
-                <a:solidFill>
-                  <a:srgbClr val="131A19"/>
+            <a:r>
+              <a:rPr sz="950" b="1">
+                <a:solidFill>
+                  <a:srgbClr val="3C4947"/>
                 </a:solidFill>
                 <a:latin typeface="맑은 고딕"/>
               </a:rPr>
-              <a:t>7,268장</a:t>
-            </a:r>
-          </a:p>
-          <a:p>
-            <a:pPr algn="l">
-              <a:lnSpc>
-                <a:spcPct val="112000"/>
-              </a:lnSpc>
-            </a:pPr>
-            <a:r>
-              <a:rPr sz="1050" b="0">
+              <a:t>7,268장뿐.</a:t>
+            </a:r>
+            <a:r>
+              <a:rPr sz="950" b="0">
                 <a:solidFill>
                   <a:srgbClr val="3C4947"/>
                 </a:solidFill>
                 <a:latin typeface="맑은 고딕"/>
               </a:rPr>
-              <a:t>뿐. 열화 쌍이 없다</a:t>
-            </a:r>
-          </a:p>
-        </p:txBody>
-      </p:sp>
-      <p:sp>
-        <p:nvSpPr>
-          <p:cNvPr id="11" name="TextBox 10"/>
-          <p:cNvSpPr txBox="1"/>
+              <a:t> 열화 쌍이 없다</a:t>
+            </a:r>
+          </a:p>
+          <a:p>
+            <a:pPr>
+              <a:lnSpc>
+                <a:spcPct val="122000"/>
+              </a:lnSpc>
+              <a:spcBef>
+                <a:spcPts val="200"/>
+              </a:spcBef>
+            </a:pPr>
+            <a:r>
+              <a:rPr sz="950" b="0">
+                <a:solidFill>
+                  <a:srgbClr val="3C4947"/>
+                </a:solidFill>
+                <a:latin typeface="맑은 고딕"/>
+              </a:rPr>
+              <a:t>매 배치마다 </a:t>
+            </a:r>
+            <a:r>
+              <a:rPr sz="950" b="0">
+                <a:solidFill>
+                  <a:srgbClr val="3C4947"/>
+                </a:solidFill>
+                <a:latin typeface="Consolas"/>
+              </a:rPr>
+              <a:t>f → dipole → +noise</a:t>
+            </a:r>
+            <a:r>
+              <a:rPr sz="950" b="0">
+                <a:solidFill>
+                  <a:srgbClr val="3C4947"/>
+                </a:solidFill>
+                <a:latin typeface="맑은 고딕"/>
+              </a:rPr>
+              <a:t> 로 직접 생성</a:t>
+            </a:r>
+          </a:p>
+          <a:p>
+            <a:pPr>
+              <a:lnSpc>
+                <a:spcPct val="122000"/>
+              </a:lnSpc>
+              <a:spcBef>
+                <a:spcPts val="0"/>
+              </a:spcBef>
+            </a:pPr>
+            <a:r>
+              <a:rPr sz="600"/>
+              <a:t/>
+            </a:r>
+          </a:p>
+          <a:p>
+            <a:pPr>
+              <a:lnSpc>
+                <a:spcPct val="122000"/>
+              </a:lnSpc>
+              <a:spcBef>
+                <a:spcPts val="200"/>
+              </a:spcBef>
+            </a:pPr>
+            <a:r>
+              <a:rPr sz="950" b="0">
+                <a:solidFill>
+                  <a:srgbClr val="3C4947"/>
+                </a:solidFill>
+                <a:latin typeface="맑은 고딕"/>
+              </a:rPr>
+              <a:t>augmentation 은 뒤집기만, </a:t>
+            </a:r>
+            <a:r>
+              <a:rPr sz="950" b="1">
+                <a:solidFill>
+                  <a:srgbClr val="3C4947"/>
+                </a:solidFill>
+                <a:latin typeface="맑은 고딕"/>
+              </a:rPr>
+              <a:t>90° 회전 제외</a:t>
+            </a:r>
+          </a:p>
+          <a:p>
+            <a:pPr>
+              <a:lnSpc>
+                <a:spcPct val="122000"/>
+              </a:lnSpc>
+              <a:spcBef>
+                <a:spcPts val="200"/>
+              </a:spcBef>
+            </a:pPr>
+            <a:r>
+              <a:rPr sz="950" b="0">
+                <a:solidFill>
+                  <a:srgbClr val="66756F"/>
+                </a:solidFill>
+                <a:latin typeface="맑은 고딕"/>
+              </a:rPr>
+              <a:t>dipole 은 B₀ 방향이 있는 비등방 연산 — 회전하면 test 에 없는 방향이 된다</a:t>
+            </a:r>
+          </a:p>
+          <a:p>
+            <a:pPr>
+              <a:lnSpc>
+                <a:spcPct val="122000"/>
+              </a:lnSpc>
+              <a:spcBef>
+                <a:spcPts val="0"/>
+              </a:spcBef>
+            </a:pPr>
+            <a:r>
+              <a:rPr sz="600"/>
+              <a:t/>
+            </a:r>
+          </a:p>
+          <a:p>
+            <a:pPr>
+              <a:lnSpc>
+                <a:spcPct val="122000"/>
+              </a:lnSpc>
+              <a:spcBef>
+                <a:spcPts val="200"/>
+              </a:spcBef>
+            </a:pPr>
+            <a:r>
+              <a:rPr sz="950" b="0">
+                <a:solidFill>
+                  <a:srgbClr val="3C4947"/>
+                </a:solidFill>
+                <a:latin typeface="맑은 고딕"/>
+              </a:rPr>
+              <a:t>크롭은 </a:t>
+            </a:r>
+            <a:r>
+              <a:rPr sz="950" b="1">
+                <a:solidFill>
+                  <a:srgbClr val="3C4947"/>
+                </a:solidFill>
+                <a:latin typeface="맑은 고딕"/>
+              </a:rPr>
+              <a:t>흐리게 만든 뒤에</a:t>
+            </a:r>
+          </a:p>
+          <a:p>
+            <a:pPr>
+              <a:lnSpc>
+                <a:spcPct val="122000"/>
+              </a:lnSpc>
+              <a:spcBef>
+                <a:spcPts val="200"/>
+              </a:spcBef>
+            </a:pPr>
+            <a:r>
+              <a:rPr sz="950" b="0">
+                <a:solidFill>
+                  <a:srgbClr val="66756F"/>
+                </a:solidFill>
+                <a:latin typeface="맑은 고딕"/>
+              </a:rPr>
+              <a:t>dipole 은 FFT 전역 연산이라 먼저 자르면 경계가 거짓이 된다</a:t>
+            </a:r>
+          </a:p>
+          <a:p>
+            <a:pPr>
+              <a:lnSpc>
+                <a:spcPct val="122000"/>
+              </a:lnSpc>
+              <a:spcBef>
+                <a:spcPts val="0"/>
+              </a:spcBef>
+            </a:pPr>
+            <a:r>
+              <a:rPr sz="600"/>
+              <a:t/>
+            </a:r>
+          </a:p>
+          <a:p>
+            <a:pPr>
+              <a:lnSpc>
+                <a:spcPct val="122000"/>
+              </a:lnSpc>
+              <a:spcBef>
+                <a:spcPts val="200"/>
+              </a:spcBef>
+            </a:pPr>
+            <a:r>
+              <a:rPr sz="950" b="0">
+                <a:solidFill>
+                  <a:srgbClr val="3C4947"/>
+                </a:solidFill>
+                <a:latin typeface="맑은 고딕"/>
+              </a:rPr>
+              <a:t>노이즈는 </a:t>
+            </a:r>
+            <a:r>
+              <a:rPr sz="950" b="1">
+                <a:solidFill>
+                  <a:srgbClr val="3C4947"/>
+                </a:solidFill>
+                <a:latin typeface="맑은 고딕"/>
+              </a:rPr>
+              <a:t>4종 시뮬레이터 그대로</a:t>
+            </a:r>
+          </a:p>
+          <a:p>
+            <a:pPr>
+              <a:lnSpc>
+                <a:spcPct val="122000"/>
+              </a:lnSpc>
+              <a:spcBef>
+                <a:spcPts val="200"/>
+              </a:spcBef>
+            </a:pPr>
+            <a:r>
+              <a:rPr sz="950" b="0">
+                <a:solidFill>
+                  <a:srgbClr val="66756F"/>
+                </a:solidFill>
+                <a:latin typeface="맑은 고딕"/>
+              </a:rPr>
+              <a:t>Gaussian 만 쓰면 Rician 의 편향을 못 배운다</a:t>
+            </a:r>
+          </a:p>
+          <a:p>
+            <a:pPr>
+              <a:lnSpc>
+                <a:spcPct val="122000"/>
+              </a:lnSpc>
+              <a:spcBef>
+                <a:spcPts val="0"/>
+              </a:spcBef>
+            </a:pPr>
+            <a:r>
+              <a:rPr sz="600"/>
+              <a:t/>
+            </a:r>
+          </a:p>
+          <a:p>
+            <a:pPr>
+              <a:lnSpc>
+                <a:spcPct val="122000"/>
+              </a:lnSpc>
+              <a:spcBef>
+                <a:spcPts val="200"/>
+              </a:spcBef>
+            </a:pPr>
+            <a:r>
+              <a:rPr sz="950" b="0">
+                <a:solidFill>
+                  <a:srgbClr val="3C4947"/>
+                </a:solidFill>
+                <a:latin typeface="맑은 고딕"/>
+              </a:rPr>
+              <a:t>val 은 파일명 seed 로 노이즈 고정 · </a:t>
+            </a:r>
+            <a:r>
+              <a:rPr sz="950" b="1">
+                <a:solidFill>
+                  <a:srgbClr val="0B6E5E"/>
+                </a:solidFill>
+                <a:latin typeface="맑은 고딕"/>
+              </a:rPr>
+              <a:t>test 는 채점에만</a:t>
+            </a:r>
+          </a:p>
+        </p:txBody>
+      </p:sp>
+      <p:sp>
+        <p:nvSpPr>
+          <p:cNvPr id="11" name="Rounded Rectangle 10"/>
+          <p:cNvSpPr/>
           <p:nvPr/>
         </p:nvSpPr>
         <p:spPr>
           <a:xfrm>
-            <a:off x="804672" y="2894076"/>
-            <a:ext cx="3154680" cy="310896"/>
-          </a:xfrm>
-          <a:prstGeom prst="rect">
-            <a:avLst/>
-          </a:prstGeom>
-          <a:noFill/>
-        </p:spPr>
-        <p:txBody>
-          <a:bodyPr wrap="square" anchor="t">
-            <a:spAutoFit/>
-          </a:bodyPr>
-          <a:lstStyle/>
-          <a:p>
-            <a:pPr algn="l">
-              <a:lnSpc>
-                <a:spcPct val="112000"/>
-              </a:lnSpc>
-            </a:pPr>
-            <a:r>
-              <a:rPr sz="1050" b="0">
-                <a:solidFill>
-                  <a:srgbClr val="3C4947"/>
-                </a:solidFill>
-                <a:latin typeface="맑은 고딕"/>
-              </a:rPr>
-              <a:t>매 배치마다 </a:t>
-            </a:r>
-          </a:p>
-          <a:p>
-            <a:pPr algn="l">
-              <a:lnSpc>
-                <a:spcPct val="112000"/>
-              </a:lnSpc>
-            </a:pPr>
-            <a:r>
-              <a:rPr sz="1050" b="0">
-                <a:solidFill>
-                  <a:srgbClr val="131A19"/>
-                </a:solidFill>
-                <a:latin typeface="Consolas"/>
-              </a:rPr>
-              <a:t>f → dipole → +noise</a:t>
-            </a:r>
-          </a:p>
-          <a:p>
-            <a:pPr algn="l">
-              <a:lnSpc>
-                <a:spcPct val="112000"/>
-              </a:lnSpc>
-            </a:pPr>
-            <a:r>
-              <a:rPr sz="1050" b="0">
-                <a:solidFill>
-                  <a:srgbClr val="3C4947"/>
-                </a:solidFill>
-                <a:latin typeface="맑은 고딕"/>
-              </a:rPr>
-              <a:t> 로 직접 생성</a:t>
-            </a:r>
-          </a:p>
-        </p:txBody>
-      </p:sp>
-      <p:sp>
-        <p:nvSpPr>
-          <p:cNvPr id="12" name="TextBox 11"/>
-          <p:cNvSpPr txBox="1"/>
-          <p:nvPr/>
-        </p:nvSpPr>
-        <p:spPr>
-          <a:xfrm>
-            <a:off x="804672" y="3342132"/>
-            <a:ext cx="3154680" cy="310896"/>
-          </a:xfrm>
-          <a:prstGeom prst="rect">
-            <a:avLst/>
-          </a:prstGeom>
-          <a:noFill/>
-        </p:spPr>
-        <p:txBody>
-          <a:bodyPr wrap="square" anchor="t">
-            <a:spAutoFit/>
-          </a:bodyPr>
-          <a:lstStyle/>
-          <a:p>
-            <a:pPr algn="l">
-              <a:lnSpc>
-                <a:spcPct val="112000"/>
-              </a:lnSpc>
-            </a:pPr>
-            <a:r>
-              <a:rPr sz="1050" b="0">
-                <a:solidFill>
-                  <a:srgbClr val="3C4947"/>
-                </a:solidFill>
-                <a:latin typeface="맑은 고딕"/>
-              </a:rPr>
-              <a:t>augmentation: </a:t>
-            </a:r>
-          </a:p>
-          <a:p>
-            <a:pPr algn="l">
-              <a:lnSpc>
-                <a:spcPct val="112000"/>
-              </a:lnSpc>
-            </a:pPr>
-            <a:r>
-              <a:rPr sz="1050" b="1">
-                <a:solidFill>
-                  <a:srgbClr val="131A19"/>
-                </a:solidFill>
-                <a:latin typeface="맑은 고딕"/>
-              </a:rPr>
-              <a:t>뒤집기만</a:t>
-            </a:r>
-          </a:p>
-          <a:p>
-            <a:pPr algn="l">
-              <a:lnSpc>
-                <a:spcPct val="112000"/>
-              </a:lnSpc>
-            </a:pPr>
-            <a:r>
-              <a:rPr sz="1050" b="0">
-                <a:solidFill>
-                  <a:srgbClr val="3C4947"/>
-                </a:solidFill>
-                <a:latin typeface="맑은 고딕"/>
-              </a:rPr>
-              <a:t>. 90° 회전 제외</a:t>
-            </a:r>
-          </a:p>
-        </p:txBody>
-      </p:sp>
-      <p:sp>
-        <p:nvSpPr>
-          <p:cNvPr id="13" name="TextBox 12"/>
-          <p:cNvSpPr txBox="1"/>
-          <p:nvPr/>
-        </p:nvSpPr>
-        <p:spPr>
-          <a:xfrm>
-            <a:off x="804672" y="3511296"/>
-            <a:ext cx="3154680" cy="310896"/>
-          </a:xfrm>
-          <a:prstGeom prst="rect">
-            <a:avLst/>
-          </a:prstGeom>
-          <a:noFill/>
-        </p:spPr>
-        <p:txBody>
-          <a:bodyPr wrap="square" anchor="t">
-            <a:spAutoFit/>
-          </a:bodyPr>
-          <a:lstStyle/>
-          <a:p>
-            <a:pPr algn="l">
-              <a:lnSpc>
-                <a:spcPct val="112000"/>
-              </a:lnSpc>
-            </a:pPr>
-            <a:r>
-              <a:rPr sz="1050" b="0">
-                <a:solidFill>
-                  <a:srgbClr val="3C4947"/>
-                </a:solidFill>
-                <a:latin typeface="맑은 고딕"/>
-              </a:rPr>
-              <a:t>→ dipole 은 B₀ 방향이 있는 </a:t>
-            </a:r>
-          </a:p>
-          <a:p>
-            <a:pPr algn="l">
-              <a:lnSpc>
-                <a:spcPct val="112000"/>
-              </a:lnSpc>
-            </a:pPr>
-            <a:r>
-              <a:rPr sz="1050" b="1">
-                <a:solidFill>
-                  <a:srgbClr val="0B6E5E"/>
-                </a:solidFill>
-                <a:latin typeface="맑은 고딕"/>
-              </a:rPr>
-              <a:t>비등방</a:t>
-            </a:r>
-          </a:p>
-          <a:p>
-            <a:pPr algn="l">
-              <a:lnSpc>
-                <a:spcPct val="112000"/>
-              </a:lnSpc>
-            </a:pPr>
-            <a:r>
-              <a:rPr sz="1050" b="0">
-                <a:solidFill>
-                  <a:srgbClr val="3C4947"/>
-                </a:solidFill>
-                <a:latin typeface="맑은 고딕"/>
-              </a:rPr>
-              <a:t> 연산. 회전하면 test 에 없는 방향이 된다</a:t>
-            </a:r>
-          </a:p>
-        </p:txBody>
-      </p:sp>
-      <p:sp>
-        <p:nvSpPr>
-          <p:cNvPr id="14" name="TextBox 13"/>
-          <p:cNvSpPr txBox="1"/>
-          <p:nvPr/>
-        </p:nvSpPr>
-        <p:spPr>
-          <a:xfrm>
-            <a:off x="804672" y="3959352"/>
-            <a:ext cx="3154680" cy="310896"/>
-          </a:xfrm>
-          <a:prstGeom prst="rect">
-            <a:avLst/>
-          </a:prstGeom>
-          <a:noFill/>
-        </p:spPr>
-        <p:txBody>
-          <a:bodyPr wrap="square" anchor="t">
-            <a:spAutoFit/>
-          </a:bodyPr>
-          <a:lstStyle/>
-          <a:p>
-            <a:pPr algn="l">
-              <a:lnSpc>
-                <a:spcPct val="112000"/>
-              </a:lnSpc>
-            </a:pPr>
-            <a:r>
-              <a:rPr sz="1050" b="0">
-                <a:solidFill>
-                  <a:srgbClr val="3C4947"/>
-                </a:solidFill>
-                <a:latin typeface="맑은 고딕"/>
-              </a:rPr>
-              <a:t>크롭은 </a:t>
-            </a:r>
-          </a:p>
-          <a:p>
-            <a:pPr algn="l">
-              <a:lnSpc>
-                <a:spcPct val="112000"/>
-              </a:lnSpc>
-            </a:pPr>
-            <a:r>
-              <a:rPr sz="1050" b="1">
-                <a:solidFill>
-                  <a:srgbClr val="131A19"/>
-                </a:solidFill>
-                <a:latin typeface="맑은 고딕"/>
-              </a:rPr>
-              <a:t>흐리게 만든 뒤</a:t>
-            </a:r>
-          </a:p>
-          <a:p>
-            <a:pPr algn="l">
-              <a:lnSpc>
-                <a:spcPct val="112000"/>
-              </a:lnSpc>
-            </a:pPr>
-            <a:r>
-              <a:rPr sz="1050" b="0">
-                <a:solidFill>
-                  <a:srgbClr val="3C4947"/>
-                </a:solidFill>
-                <a:latin typeface="맑은 고딕"/>
-              </a:rPr>
-              <a:t>에</a:t>
-            </a:r>
-          </a:p>
-        </p:txBody>
-      </p:sp>
-      <p:sp>
-        <p:nvSpPr>
-          <p:cNvPr id="15" name="TextBox 14"/>
-          <p:cNvSpPr txBox="1"/>
-          <p:nvPr/>
-        </p:nvSpPr>
-        <p:spPr>
-          <a:xfrm>
-            <a:off x="804672" y="4128516"/>
-            <a:ext cx="3154680" cy="310896"/>
-          </a:xfrm>
-          <a:prstGeom prst="rect">
-            <a:avLst/>
-          </a:prstGeom>
-          <a:noFill/>
-        </p:spPr>
-        <p:txBody>
-          <a:bodyPr wrap="square" anchor="t">
-            <a:spAutoFit/>
-          </a:bodyPr>
-          <a:lstStyle/>
-          <a:p>
-            <a:pPr algn="l">
-              <a:lnSpc>
-                <a:spcPct val="112000"/>
-              </a:lnSpc>
-            </a:pPr>
-            <a:r>
-              <a:rPr sz="1050" b="0">
-                <a:solidFill>
-                  <a:srgbClr val="3C4947"/>
-                </a:solidFill>
-                <a:latin typeface="맑은 고딕"/>
-              </a:rPr>
-              <a:t>→ dipole 은 FFT 전역 연산. 먼저 자르면 경계가 거짓이 된다</a:t>
-            </a:r>
-          </a:p>
-        </p:txBody>
-      </p:sp>
-      <p:sp>
-        <p:nvSpPr>
-          <p:cNvPr id="16" name="TextBox 15"/>
-          <p:cNvSpPr txBox="1"/>
-          <p:nvPr/>
-        </p:nvSpPr>
-        <p:spPr>
-          <a:xfrm>
-            <a:off x="804672" y="4576572"/>
-            <a:ext cx="3154680" cy="310896"/>
-          </a:xfrm>
-          <a:prstGeom prst="rect">
-            <a:avLst/>
-          </a:prstGeom>
-          <a:noFill/>
-        </p:spPr>
-        <p:txBody>
-          <a:bodyPr wrap="square" anchor="t">
-            <a:spAutoFit/>
-          </a:bodyPr>
-          <a:lstStyle/>
-          <a:p>
-            <a:pPr algn="l">
-              <a:lnSpc>
-                <a:spcPct val="112000"/>
-              </a:lnSpc>
-            </a:pPr>
-            <a:r>
-              <a:rPr sz="1050" b="0">
-                <a:solidFill>
-                  <a:srgbClr val="3C4947"/>
-                </a:solidFill>
-                <a:latin typeface="맑은 고딕"/>
-              </a:rPr>
-              <a:t>노이즈는 </a:t>
-            </a:r>
-          </a:p>
-          <a:p>
-            <a:pPr algn="l">
-              <a:lnSpc>
-                <a:spcPct val="112000"/>
-              </a:lnSpc>
-            </a:pPr>
-            <a:r>
-              <a:rPr sz="1050" b="1">
-                <a:solidFill>
-                  <a:srgbClr val="131A19"/>
-                </a:solidFill>
-                <a:latin typeface="맑은 고딕"/>
-              </a:rPr>
-              <a:t>4종 시뮬레이터</a:t>
-            </a:r>
-          </a:p>
-          <a:p>
-            <a:pPr algn="l">
-              <a:lnSpc>
-                <a:spcPct val="112000"/>
-              </a:lnSpc>
-            </a:pPr>
-            <a:r>
-              <a:rPr sz="1050" b="0">
-                <a:solidFill>
-                  <a:srgbClr val="3C4947"/>
-                </a:solidFill>
-                <a:latin typeface="맑은 고딕"/>
-              </a:rPr>
-              <a:t> 그대로</a:t>
-            </a:r>
-          </a:p>
-        </p:txBody>
-      </p:sp>
-      <p:sp>
-        <p:nvSpPr>
-          <p:cNvPr id="17" name="TextBox 16"/>
-          <p:cNvSpPr txBox="1"/>
-          <p:nvPr/>
-        </p:nvSpPr>
-        <p:spPr>
-          <a:xfrm>
-            <a:off x="804672" y="4745736"/>
-            <a:ext cx="3154680" cy="310896"/>
-          </a:xfrm>
-          <a:prstGeom prst="rect">
-            <a:avLst/>
-          </a:prstGeom>
-          <a:noFill/>
-        </p:spPr>
-        <p:txBody>
-          <a:bodyPr wrap="square" anchor="t">
-            <a:spAutoFit/>
-          </a:bodyPr>
-          <a:lstStyle/>
-          <a:p>
-            <a:pPr algn="l">
-              <a:lnSpc>
-                <a:spcPct val="112000"/>
-              </a:lnSpc>
-            </a:pPr>
-            <a:r>
-              <a:rPr sz="1050" b="0">
-                <a:solidFill>
-                  <a:srgbClr val="3C4947"/>
-                </a:solidFill>
-                <a:latin typeface="맑은 고딕"/>
-              </a:rPr>
-              <a:t>→ Gaussian 만 쓰면 Rician 의 편향을 못 배운다</a:t>
-            </a:r>
-          </a:p>
-        </p:txBody>
-      </p:sp>
-      <p:sp>
-        <p:nvSpPr>
-          <p:cNvPr id="18" name="TextBox 17"/>
-          <p:cNvSpPr txBox="1"/>
-          <p:nvPr/>
-        </p:nvSpPr>
-        <p:spPr>
-          <a:xfrm>
-            <a:off x="804672" y="5193792"/>
-            <a:ext cx="3154680" cy="310896"/>
-          </a:xfrm>
-          <a:prstGeom prst="rect">
-            <a:avLst/>
-          </a:prstGeom>
-          <a:noFill/>
-        </p:spPr>
-        <p:txBody>
-          <a:bodyPr wrap="square" anchor="t">
-            <a:spAutoFit/>
-          </a:bodyPr>
-          <a:lstStyle/>
-          <a:p>
-            <a:pPr algn="l">
-              <a:lnSpc>
-                <a:spcPct val="112000"/>
-              </a:lnSpc>
-            </a:pPr>
-            <a:r>
-              <a:rPr sz="1050" b="0">
-                <a:solidFill>
-                  <a:srgbClr val="3C4947"/>
-                </a:solidFill>
-                <a:latin typeface="맑은 고딕"/>
-              </a:rPr>
-              <a:t>val 은 파일명 seed 로 노이즈 고정 · </a:t>
-            </a:r>
-          </a:p>
-          <a:p>
-            <a:pPr algn="l">
-              <a:lnSpc>
-                <a:spcPct val="112000"/>
-              </a:lnSpc>
-            </a:pPr>
-            <a:r>
-              <a:rPr sz="1050" b="1">
-                <a:solidFill>
-                  <a:srgbClr val="0B6E5E"/>
-                </a:solidFill>
-                <a:latin typeface="맑은 고딕"/>
-              </a:rPr>
-              <a:t>test 는 채점에만</a:t>
-            </a:r>
-          </a:p>
-        </p:txBody>
-      </p:sp>
-      <p:sp>
-        <p:nvSpPr>
-          <p:cNvPr id="19" name="Rounded Rectangle 18"/>
-          <p:cNvSpPr/>
-          <p:nvPr/>
-        </p:nvSpPr>
-        <p:spPr>
-          <a:xfrm>
-            <a:off x="4361688" y="1572768"/>
-            <a:ext cx="3611880" cy="4462272"/>
+            <a:off x="4361688" y="2066543"/>
+            <a:ext cx="3611880" cy="4160520"/>
           </a:xfrm>
           <a:prstGeom prst="roundRect">
             <a:avLst>
@@ -4031,14 +3794,14 @@
       </p:sp>
       <p:sp>
         <p:nvSpPr>
-          <p:cNvPr id="20" name="TextBox 19"/>
+          <p:cNvPr id="12" name="TextBox 11"/>
           <p:cNvSpPr txBox="1"/>
           <p:nvPr/>
         </p:nvSpPr>
         <p:spPr>
           <a:xfrm>
-            <a:off x="4599432" y="1755648"/>
-            <a:ext cx="3611880" cy="274320"/>
+            <a:off x="4581144" y="2212847"/>
+            <a:ext cx="3611880" cy="237744"/>
           </a:xfrm>
           <a:prstGeom prst="rect">
             <a:avLst/>
@@ -4057,7 +3820,7 @@
               </a:lnSpc>
             </a:pPr>
             <a:r>
-              <a:rPr sz="1100" b="1">
+              <a:rPr sz="1000" b="1">
                 <a:solidFill>
                   <a:srgbClr val="0B6E5E"/>
                 </a:solidFill>
@@ -4070,14 +3833,14 @@
       </p:sp>
       <p:sp>
         <p:nvSpPr>
-          <p:cNvPr id="21" name="TextBox 20"/>
+          <p:cNvPr id="13" name="TextBox 12"/>
           <p:cNvSpPr txBox="1"/>
           <p:nvPr/>
         </p:nvSpPr>
         <p:spPr>
           <a:xfrm>
-            <a:off x="4599432" y="1975104"/>
-            <a:ext cx="3154680" cy="365760"/>
+            <a:off x="4581144" y="2414015"/>
+            <a:ext cx="3172968" cy="310896"/>
           </a:xfrm>
           <a:prstGeom prst="rect">
             <a:avLst/>
@@ -4096,7 +3859,7 @@
               </a:lnSpc>
             </a:pPr>
             <a:r>
-              <a:rPr sz="1900" b="1">
+              <a:rPr sz="1600" b="1">
                 <a:solidFill>
                   <a:srgbClr val="131A19"/>
                 </a:solidFill>
@@ -4109,14 +3872,14 @@
       </p:sp>
       <p:sp>
         <p:nvSpPr>
-          <p:cNvPr id="22" name="TextBox 21"/>
+          <p:cNvPr id="14" name="TextBox 13"/>
           <p:cNvSpPr txBox="1"/>
           <p:nvPr/>
         </p:nvSpPr>
         <p:spPr>
           <a:xfrm>
-            <a:off x="4599432" y="2359152"/>
-            <a:ext cx="3154680" cy="274320"/>
+            <a:off x="4581144" y="2724911"/>
+            <a:ext cx="3172968" cy="219456"/>
           </a:xfrm>
           <a:prstGeom prst="rect">
             <a:avLst/>
@@ -4135,7 +3898,7 @@
               </a:lnSpc>
             </a:pPr>
             <a:r>
-              <a:rPr sz="1100" b="0">
+              <a:rPr sz="1000" b="0">
                 <a:solidFill>
                   <a:srgbClr val="66756F"/>
                 </a:solidFill>
@@ -4148,14 +3911,14 @@
       </p:sp>
       <p:sp>
         <p:nvSpPr>
-          <p:cNvPr id="23" name="TextBox 22"/>
+          <p:cNvPr id="15" name="TextBox 14"/>
           <p:cNvSpPr txBox="1"/>
           <p:nvPr/>
         </p:nvSpPr>
         <p:spPr>
           <a:xfrm>
-            <a:off x="4599432" y="2724912"/>
-            <a:ext cx="3154680" cy="310896"/>
+            <a:off x="4581144" y="2999231"/>
+            <a:ext cx="3172968" cy="3063240"/>
           </a:xfrm>
           <a:prstGeom prst="rect">
             <a:avLst/>
@@ -4168,418 +3931,327 @@
           </a:bodyPr>
           <a:lstStyle/>
           <a:p>
-            <a:pPr algn="l">
-              <a:lnSpc>
-                <a:spcPct val="112000"/>
-              </a:lnSpc>
-            </a:pPr>
-            <a:r>
-              <a:rPr sz="1050" b="0">
-                <a:solidFill>
-                  <a:srgbClr val="131A19"/>
+            <a:pPr>
+              <a:lnSpc>
+                <a:spcPct val="122000"/>
+              </a:lnSpc>
+              <a:spcBef>
+                <a:spcPts val="200"/>
+              </a:spcBef>
+            </a:pPr>
+            <a:r>
+              <a:rPr sz="950" b="0">
+                <a:solidFill>
+                  <a:srgbClr val="3C4947"/>
                 </a:solidFill>
                 <a:latin typeface="Consolas"/>
               </a:rPr>
               <a:t>x₀ = Wiener(g, λ₀)</a:t>
             </a:r>
           </a:p>
-        </p:txBody>
-      </p:sp>
-      <p:sp>
-        <p:nvSpPr>
-          <p:cNvPr id="24" name="TextBox 23"/>
-          <p:cNvSpPr txBox="1"/>
+          <a:p>
+            <a:pPr>
+              <a:lnSpc>
+                <a:spcPct val="122000"/>
+              </a:lnSpc>
+              <a:spcBef>
+                <a:spcPts val="200"/>
+              </a:spcBef>
+            </a:pPr>
+            <a:r>
+              <a:rPr sz="950" b="0">
+                <a:solidFill>
+                  <a:srgbClr val="3C4947"/>
+                </a:solidFill>
+                <a:latin typeface="Consolas"/>
+              </a:rPr>
+              <a:t>반복 N:  z = DRUNet(x, σ̂)</a:t>
+            </a:r>
+          </a:p>
+          <a:p>
+            <a:pPr>
+              <a:lnSpc>
+                <a:spcPct val="122000"/>
+              </a:lnSpc>
+              <a:spcBef>
+                <a:spcPts val="200"/>
+              </a:spcBef>
+            </a:pPr>
+            <a:r>
+              <a:rPr sz="950" b="0">
+                <a:solidFill>
+                  <a:srgbClr val="3C4947"/>
+                </a:solidFill>
+                <a:latin typeface="Consolas"/>
+              </a:rPr>
+              <a:t>             x = (D·G + λZ) / (D² + λ)</a:t>
+            </a:r>
+          </a:p>
+          <a:p>
+            <a:pPr>
+              <a:lnSpc>
+                <a:spcPct val="122000"/>
+              </a:lnSpc>
+              <a:spcBef>
+                <a:spcPts val="0"/>
+              </a:spcBef>
+            </a:pPr>
+            <a:r>
+              <a:rPr sz="600"/>
+              <a:t/>
+            </a:r>
+          </a:p>
+          <a:p>
+            <a:pPr>
+              <a:lnSpc>
+                <a:spcPct val="122000"/>
+              </a:lnSpc>
+              <a:spcBef>
+                <a:spcPts val="200"/>
+              </a:spcBef>
+            </a:pPr>
+            <a:r>
+              <a:rPr sz="950" b="0">
+                <a:solidFill>
+                  <a:srgbClr val="3C4947"/>
+                </a:solidFill>
+                <a:latin typeface="맑은 고딕"/>
+              </a:rPr>
+              <a:t>데이터 정합 단계에 </a:t>
+            </a:r>
+            <a:r>
+              <a:rPr sz="950" b="1">
+                <a:solidFill>
+                  <a:srgbClr val="3C4947"/>
+                </a:solidFill>
+                <a:latin typeface="맑은 고딕"/>
+              </a:rPr>
+              <a:t>dipole D 가 그대로</a:t>
+            </a:r>
+            <a:r>
+              <a:rPr sz="950" b="0">
+                <a:solidFill>
+                  <a:srgbClr val="3C4947"/>
+                </a:solidFill>
+                <a:latin typeface="맑은 고딕"/>
+              </a:rPr>
+              <a:t> 들어간다</a:t>
+            </a:r>
+          </a:p>
+          <a:p>
+            <a:pPr>
+              <a:lnSpc>
+                <a:spcPct val="122000"/>
+              </a:lnSpc>
+              <a:spcBef>
+                <a:spcPts val="200"/>
+              </a:spcBef>
+            </a:pPr>
+            <a:r>
+              <a:rPr sz="950" b="0">
+                <a:solidFill>
+                  <a:srgbClr val="66756F"/>
+                </a:solidFill>
+                <a:latin typeface="맑은 고딕"/>
+              </a:rPr>
+              <a:t>→ 물리를 배울 필요가 없다</a:t>
+            </a:r>
+          </a:p>
+          <a:p>
+            <a:pPr>
+              <a:lnSpc>
+                <a:spcPct val="122000"/>
+              </a:lnSpc>
+              <a:spcBef>
+                <a:spcPts val="0"/>
+              </a:spcBef>
+            </a:pPr>
+            <a:r>
+              <a:rPr sz="600"/>
+              <a:t/>
+            </a:r>
+          </a:p>
+          <a:p>
+            <a:pPr>
+              <a:lnSpc>
+                <a:spcPct val="122000"/>
+              </a:lnSpc>
+              <a:spcBef>
+                <a:spcPts val="200"/>
+              </a:spcBef>
+            </a:pPr>
+            <a:r>
+              <a:rPr sz="950" b="1">
+                <a:solidFill>
+                  <a:srgbClr val="3C4947"/>
+                </a:solidFill>
+                <a:latin typeface="맑은 고딕"/>
+              </a:rPr>
+              <a:t>가중치 공유</a:t>
+            </a:r>
+            <a:r>
+              <a:rPr sz="950" b="0">
+                <a:solidFill>
+                  <a:srgbClr val="3C4947"/>
+                </a:solidFill>
+                <a:latin typeface="맑은 고딕"/>
+              </a:rPr>
+              <a:t> — N 단계가 같은 망</a:t>
+            </a:r>
+          </a:p>
+          <a:p>
+            <a:pPr>
+              <a:lnSpc>
+                <a:spcPct val="122000"/>
+              </a:lnSpc>
+              <a:spcBef>
+                <a:spcPts val="200"/>
+              </a:spcBef>
+            </a:pPr>
+            <a:r>
+              <a:rPr sz="950" b="0">
+                <a:solidFill>
+                  <a:srgbClr val="66756F"/>
+                </a:solidFill>
+                <a:latin typeface="맑은 고딕"/>
+              </a:rPr>
+              <a:t>파라미터 N배 절약. 추론 때 반복 수를 바꿀 수 있다</a:t>
+            </a:r>
+          </a:p>
+          <a:p>
+            <a:pPr>
+              <a:lnSpc>
+                <a:spcPct val="122000"/>
+              </a:lnSpc>
+              <a:spcBef>
+                <a:spcPts val="0"/>
+              </a:spcBef>
+            </a:pPr>
+            <a:r>
+              <a:rPr sz="600"/>
+              <a:t/>
+            </a:r>
+          </a:p>
+          <a:p>
+            <a:pPr>
+              <a:lnSpc>
+                <a:spcPct val="122000"/>
+              </a:lnSpc>
+              <a:spcBef>
+                <a:spcPts val="200"/>
+              </a:spcBef>
+            </a:pPr>
+            <a:r>
+              <a:rPr sz="950" b="1">
+                <a:solidFill>
+                  <a:srgbClr val="3C4947"/>
+                </a:solidFill>
+                <a:latin typeface="맑은 고딕"/>
+              </a:rPr>
+              <a:t>σ 조건화</a:t>
+            </a:r>
+            <a:r>
+              <a:rPr sz="950" b="0">
+                <a:solidFill>
+                  <a:srgbClr val="3C4947"/>
+                </a:solidFill>
+                <a:latin typeface="맑은 고딕"/>
+              </a:rPr>
+              <a:t> — 세기를 여분 채널로. 단 </a:t>
+            </a:r>
+            <a:r>
+              <a:rPr sz="950" b="1">
+                <a:solidFill>
+                  <a:srgbClr val="0B6E5E"/>
+                </a:solidFill>
+                <a:latin typeface="맑은 고딕"/>
+              </a:rPr>
+              <a:t>σ 는 측정치에서 읽는다</a:t>
+            </a:r>
+          </a:p>
+          <a:p>
+            <a:pPr>
+              <a:lnSpc>
+                <a:spcPct val="122000"/>
+              </a:lnSpc>
+              <a:spcBef>
+                <a:spcPts val="200"/>
+              </a:spcBef>
+            </a:pPr>
+            <a:r>
+              <a:rPr sz="950" b="0">
+                <a:solidFill>
+                  <a:srgbClr val="66756F"/>
+                </a:solidFill>
+                <a:latin typeface="맑은 고딕"/>
+              </a:rPr>
+              <a:t>영널 원뿔엔 노이즈만 있다 → 라벨·메타데이터 불필요 (오차 1.9%)</a:t>
+            </a:r>
+          </a:p>
+          <a:p>
+            <a:pPr>
+              <a:lnSpc>
+                <a:spcPct val="122000"/>
+              </a:lnSpc>
+              <a:spcBef>
+                <a:spcPts val="0"/>
+              </a:spcBef>
+            </a:pPr>
+            <a:r>
+              <a:rPr sz="600"/>
+              <a:t/>
+            </a:r>
+          </a:p>
+          <a:p>
+            <a:pPr>
+              <a:lnSpc>
+                <a:spcPct val="122000"/>
+              </a:lnSpc>
+              <a:spcBef>
+                <a:spcPts val="200"/>
+              </a:spcBef>
+            </a:pPr>
+            <a:r>
+              <a:rPr sz="950" b="0">
+                <a:solidFill>
+                  <a:srgbClr val="3C4947"/>
+                </a:solidFill>
+                <a:latin typeface="맑은 고딕"/>
+              </a:rPr>
+              <a:t>제출 = 구조가 다른 두 모델 평균</a:t>
+            </a:r>
+          </a:p>
+          <a:p>
+            <a:pPr>
+              <a:lnSpc>
+                <a:spcPct val="122000"/>
+              </a:lnSpc>
+              <a:spcBef>
+                <a:spcPts val="200"/>
+              </a:spcBef>
+            </a:pPr>
+            <a:r>
+              <a:rPr sz="950" b="1">
+                <a:solidFill>
+                  <a:srgbClr val="3C4947"/>
+                </a:solidFill>
+                <a:latin typeface="맑은 고딕"/>
+              </a:rPr>
+              <a:t>4단계 30.32  +  6단계 30.41  →  30.44</a:t>
+            </a:r>
+          </a:p>
+        </p:txBody>
+      </p:sp>
+      <p:sp>
+        <p:nvSpPr>
+          <p:cNvPr id="16" name="Rounded Rectangle 15"/>
+          <p:cNvSpPr/>
           <p:nvPr/>
         </p:nvSpPr>
         <p:spPr>
           <a:xfrm>
-            <a:off x="4599432" y="2894076"/>
-            <a:ext cx="3154680" cy="310896"/>
-          </a:xfrm>
-          <a:prstGeom prst="rect">
-            <a:avLst/>
-          </a:prstGeom>
-          <a:noFill/>
-        </p:spPr>
-        <p:txBody>
-          <a:bodyPr wrap="square" anchor="t">
-            <a:spAutoFit/>
-          </a:bodyPr>
-          <a:lstStyle/>
-          <a:p>
-            <a:pPr algn="l">
-              <a:lnSpc>
-                <a:spcPct val="112000"/>
-              </a:lnSpc>
-            </a:pPr>
-            <a:r>
-              <a:rPr sz="1050" b="0">
-                <a:solidFill>
-                  <a:srgbClr val="131A19"/>
-                </a:solidFill>
-                <a:latin typeface="Consolas"/>
-              </a:rPr>
-              <a:t>반복 N: </a:t>
-            </a:r>
-          </a:p>
-          <a:p>
-            <a:pPr algn="l">
-              <a:lnSpc>
-                <a:spcPct val="112000"/>
-              </a:lnSpc>
-            </a:pPr>
-            <a:r>
-              <a:rPr sz="1050" b="0">
-                <a:solidFill>
-                  <a:srgbClr val="131A19"/>
-                </a:solidFill>
-                <a:latin typeface="Consolas"/>
-              </a:rPr>
-              <a:t>z = DRUNet(x, σ̂)</a:t>
-            </a:r>
-          </a:p>
-        </p:txBody>
-      </p:sp>
-      <p:sp>
-        <p:nvSpPr>
-          <p:cNvPr id="25" name="TextBox 24"/>
-          <p:cNvSpPr txBox="1"/>
-          <p:nvPr/>
-        </p:nvSpPr>
-        <p:spPr>
-          <a:xfrm>
-            <a:off x="4599432" y="3063240"/>
-            <a:ext cx="3154680" cy="310896"/>
-          </a:xfrm>
-          <a:prstGeom prst="rect">
-            <a:avLst/>
-          </a:prstGeom>
-          <a:noFill/>
-        </p:spPr>
-        <p:txBody>
-          <a:bodyPr wrap="square" anchor="t">
-            <a:spAutoFit/>
-          </a:bodyPr>
-          <a:lstStyle/>
-          <a:p>
-            <a:pPr algn="l">
-              <a:lnSpc>
-                <a:spcPct val="112000"/>
-              </a:lnSpc>
-            </a:pPr>
-            <a:r>
-              <a:rPr sz="1050" b="0">
-                <a:solidFill>
-                  <a:srgbClr val="131A19"/>
-                </a:solidFill>
-                <a:latin typeface="Consolas"/>
-              </a:rPr>
-              <a:t>          x = (D·G + λZ)/(D² + λ)</a:t>
-            </a:r>
-          </a:p>
-        </p:txBody>
-      </p:sp>
-      <p:sp>
-        <p:nvSpPr>
-          <p:cNvPr id="26" name="TextBox 25"/>
-          <p:cNvSpPr txBox="1"/>
-          <p:nvPr/>
-        </p:nvSpPr>
-        <p:spPr>
-          <a:xfrm>
-            <a:off x="4599432" y="3511296"/>
-            <a:ext cx="3154680" cy="310896"/>
-          </a:xfrm>
-          <a:prstGeom prst="rect">
-            <a:avLst/>
-          </a:prstGeom>
-          <a:noFill/>
-        </p:spPr>
-        <p:txBody>
-          <a:bodyPr wrap="square" anchor="t">
-            <a:spAutoFit/>
-          </a:bodyPr>
-          <a:lstStyle/>
-          <a:p>
-            <a:pPr algn="l">
-              <a:lnSpc>
-                <a:spcPct val="112000"/>
-              </a:lnSpc>
-            </a:pPr>
-            <a:r>
-              <a:rPr sz="1050" b="0">
-                <a:solidFill>
-                  <a:srgbClr val="3C4947"/>
-                </a:solidFill>
-                <a:latin typeface="맑은 고딕"/>
-              </a:rPr>
-              <a:t>데이터 정합 단계에 </a:t>
-            </a:r>
-          </a:p>
-          <a:p>
-            <a:pPr algn="l">
-              <a:lnSpc>
-                <a:spcPct val="112000"/>
-              </a:lnSpc>
-            </a:pPr>
-            <a:r>
-              <a:rPr sz="1050" b="1">
-                <a:solidFill>
-                  <a:srgbClr val="131A19"/>
-                </a:solidFill>
-                <a:latin typeface="맑은 고딕"/>
-              </a:rPr>
-              <a:t>dipole D 가 그대로</a:t>
-            </a:r>
-          </a:p>
-          <a:p>
-            <a:pPr algn="l">
-              <a:lnSpc>
-                <a:spcPct val="112000"/>
-              </a:lnSpc>
-            </a:pPr>
-            <a:r>
-              <a:rPr sz="1050" b="0">
-                <a:solidFill>
-                  <a:srgbClr val="3C4947"/>
-                </a:solidFill>
-                <a:latin typeface="맑은 고딕"/>
-              </a:rPr>
-              <a:t> 들어간다 → 물리를 배울 필요가 없다</a:t>
-            </a:r>
-          </a:p>
-        </p:txBody>
-      </p:sp>
-      <p:sp>
-        <p:nvSpPr>
-          <p:cNvPr id="27" name="TextBox 26"/>
-          <p:cNvSpPr txBox="1"/>
-          <p:nvPr/>
-        </p:nvSpPr>
-        <p:spPr>
-          <a:xfrm>
-            <a:off x="4599432" y="3959352"/>
-            <a:ext cx="3154680" cy="310896"/>
-          </a:xfrm>
-          <a:prstGeom prst="rect">
-            <a:avLst/>
-          </a:prstGeom>
-          <a:noFill/>
-        </p:spPr>
-        <p:txBody>
-          <a:bodyPr wrap="square" anchor="t">
-            <a:spAutoFit/>
-          </a:bodyPr>
-          <a:lstStyle/>
-          <a:p>
-            <a:pPr algn="l">
-              <a:lnSpc>
-                <a:spcPct val="112000"/>
-              </a:lnSpc>
-            </a:pPr>
-            <a:r>
-              <a:rPr sz="1050" b="1">
-                <a:solidFill>
-                  <a:srgbClr val="131A19"/>
-                </a:solidFill>
-                <a:latin typeface="맑은 고딕"/>
-              </a:rPr>
-              <a:t>가중치 공유</a:t>
-            </a:r>
-          </a:p>
-          <a:p>
-            <a:pPr algn="l">
-              <a:lnSpc>
-                <a:spcPct val="112000"/>
-              </a:lnSpc>
-            </a:pPr>
-            <a:r>
-              <a:rPr sz="1050" b="0">
-                <a:solidFill>
-                  <a:srgbClr val="3C4947"/>
-                </a:solidFill>
-                <a:latin typeface="맑은 고딕"/>
-              </a:rPr>
-              <a:t> — N 단계가 같은 망. 파라미터 N배 절약, 추론 때 반복 수를 바꿀 수 있다</a:t>
-            </a:r>
-          </a:p>
-        </p:txBody>
-      </p:sp>
-      <p:sp>
-        <p:nvSpPr>
-          <p:cNvPr id="28" name="TextBox 27"/>
-          <p:cNvSpPr txBox="1"/>
-          <p:nvPr/>
-        </p:nvSpPr>
-        <p:spPr>
-          <a:xfrm>
-            <a:off x="4599432" y="4407408"/>
-            <a:ext cx="3154680" cy="310896"/>
-          </a:xfrm>
-          <a:prstGeom prst="rect">
-            <a:avLst/>
-          </a:prstGeom>
-          <a:noFill/>
-        </p:spPr>
-        <p:txBody>
-          <a:bodyPr wrap="square" anchor="t">
-            <a:spAutoFit/>
-          </a:bodyPr>
-          <a:lstStyle/>
-          <a:p>
-            <a:pPr algn="l">
-              <a:lnSpc>
-                <a:spcPct val="112000"/>
-              </a:lnSpc>
-            </a:pPr>
-            <a:r>
-              <a:rPr sz="1050" b="1">
-                <a:solidFill>
-                  <a:srgbClr val="131A19"/>
-                </a:solidFill>
-                <a:latin typeface="맑은 고딕"/>
-              </a:rPr>
-              <a:t>σ 조건화</a:t>
-            </a:r>
-          </a:p>
-          <a:p>
-            <a:pPr algn="l">
-              <a:lnSpc>
-                <a:spcPct val="112000"/>
-              </a:lnSpc>
-            </a:pPr>
-            <a:r>
-              <a:rPr sz="1050" b="0">
-                <a:solidFill>
-                  <a:srgbClr val="3C4947"/>
-                </a:solidFill>
-                <a:latin typeface="맑은 고딕"/>
-              </a:rPr>
-              <a:t> — 세기를 여분 채널로. 단 </a:t>
-            </a:r>
-          </a:p>
-          <a:p>
-            <a:pPr algn="l">
-              <a:lnSpc>
-                <a:spcPct val="112000"/>
-              </a:lnSpc>
-            </a:pPr>
-            <a:r>
-              <a:rPr sz="1050" b="1">
-                <a:solidFill>
-                  <a:srgbClr val="0B6E5E"/>
-                </a:solidFill>
-                <a:latin typeface="맑은 고딕"/>
-              </a:rPr>
-              <a:t>σ 는 측정치에서 읽는다</a:t>
-            </a:r>
-          </a:p>
-        </p:txBody>
-      </p:sp>
-      <p:sp>
-        <p:nvSpPr>
-          <p:cNvPr id="29" name="TextBox 28"/>
-          <p:cNvSpPr txBox="1"/>
-          <p:nvPr/>
-        </p:nvSpPr>
-        <p:spPr>
-          <a:xfrm>
-            <a:off x="4599432" y="4745736"/>
-            <a:ext cx="3154680" cy="310896"/>
-          </a:xfrm>
-          <a:prstGeom prst="rect">
-            <a:avLst/>
-          </a:prstGeom>
-          <a:noFill/>
-        </p:spPr>
-        <p:txBody>
-          <a:bodyPr wrap="square" anchor="t">
-            <a:spAutoFit/>
-          </a:bodyPr>
-          <a:lstStyle/>
-          <a:p>
-            <a:pPr algn="l">
-              <a:lnSpc>
-                <a:spcPct val="112000"/>
-              </a:lnSpc>
-            </a:pPr>
-            <a:r>
-              <a:rPr sz="1050" b="0">
-                <a:solidFill>
-                  <a:srgbClr val="3C4947"/>
-                </a:solidFill>
-                <a:latin typeface="맑은 고딕"/>
-              </a:rPr>
-              <a:t>→ 영널 원뿔(|D|&lt;0.02)엔 노이즈만 있다. 라벨·메타데이터 불필요 (오차 1.9%)</a:t>
-            </a:r>
-          </a:p>
-        </p:txBody>
-      </p:sp>
-      <p:sp>
-        <p:nvSpPr>
-          <p:cNvPr id="30" name="TextBox 29"/>
-          <p:cNvSpPr txBox="1"/>
-          <p:nvPr/>
-        </p:nvSpPr>
-        <p:spPr>
-          <a:xfrm>
-            <a:off x="4599432" y="5193792"/>
-            <a:ext cx="3154680" cy="310896"/>
-          </a:xfrm>
-          <a:prstGeom prst="rect">
-            <a:avLst/>
-          </a:prstGeom>
-          <a:noFill/>
-        </p:spPr>
-        <p:txBody>
-          <a:bodyPr wrap="square" anchor="t">
-            <a:spAutoFit/>
-          </a:bodyPr>
-          <a:lstStyle/>
-          <a:p>
-            <a:pPr algn="l">
-              <a:lnSpc>
-                <a:spcPct val="112000"/>
-              </a:lnSpc>
-            </a:pPr>
-            <a:r>
-              <a:rPr sz="1050" b="0">
-                <a:solidFill>
-                  <a:srgbClr val="3C4947"/>
-                </a:solidFill>
-                <a:latin typeface="맑은 고딕"/>
-              </a:rPr>
-              <a:t>제출 = 구조가 다른 두 모델 평균 </a:t>
-            </a:r>
-          </a:p>
-          <a:p>
-            <a:pPr algn="l">
-              <a:lnSpc>
-                <a:spcPct val="112000"/>
-              </a:lnSpc>
-            </a:pPr>
-            <a:r>
-              <a:rPr sz="1050" b="1">
-                <a:solidFill>
-                  <a:srgbClr val="131A19"/>
-                </a:solidFill>
-                <a:latin typeface="맑은 고딕"/>
-              </a:rPr>
-              <a:t>4단계 30.32 + 6단계 30.41 → 30.44</a:t>
-            </a:r>
-          </a:p>
-        </p:txBody>
-      </p:sp>
-      <p:sp>
-        <p:nvSpPr>
-          <p:cNvPr id="31" name="Rounded Rectangle 30"/>
-          <p:cNvSpPr/>
-          <p:nvPr/>
-        </p:nvSpPr>
-        <p:spPr>
-          <a:xfrm>
-            <a:off x="8156448" y="1572768"/>
-            <a:ext cx="3611880" cy="4462272"/>
+            <a:off x="8156448" y="2066543"/>
+            <a:ext cx="3611880" cy="4160520"/>
           </a:xfrm>
           <a:prstGeom prst="roundRect">
             <a:avLst>
@@ -4620,14 +4292,14 @@
       </p:sp>
       <p:sp>
         <p:nvSpPr>
-          <p:cNvPr id="32" name="TextBox 31"/>
+          <p:cNvPr id="17" name="TextBox 16"/>
           <p:cNvSpPr txBox="1"/>
           <p:nvPr/>
         </p:nvSpPr>
         <p:spPr>
           <a:xfrm>
-            <a:off x="8394192" y="1755648"/>
-            <a:ext cx="3611880" cy="274320"/>
+            <a:off x="8375904" y="2212847"/>
+            <a:ext cx="3611880" cy="237744"/>
           </a:xfrm>
           <a:prstGeom prst="rect">
             <a:avLst/>
@@ -4646,7 +4318,7 @@
               </a:lnSpc>
             </a:pPr>
             <a:r>
-              <a:rPr sz="1100" b="1">
+              <a:rPr sz="1000" b="1">
                 <a:solidFill>
                   <a:srgbClr val="0B6E5E"/>
                 </a:solidFill>
@@ -4659,14 +4331,14 @@
       </p:sp>
       <p:sp>
         <p:nvSpPr>
-          <p:cNvPr id="33" name="TextBox 32"/>
+          <p:cNvPr id="18" name="TextBox 17"/>
           <p:cNvSpPr txBox="1"/>
           <p:nvPr/>
         </p:nvSpPr>
         <p:spPr>
           <a:xfrm>
-            <a:off x="8394192" y="1975104"/>
-            <a:ext cx="3154680" cy="365760"/>
+            <a:off x="8375904" y="2414015"/>
+            <a:ext cx="3172968" cy="310896"/>
           </a:xfrm>
           <a:prstGeom prst="rect">
             <a:avLst/>
@@ -4685,7 +4357,7 @@
               </a:lnSpc>
             </a:pPr>
             <a:r>
-              <a:rPr sz="1900" b="1">
+              <a:rPr sz="1600" b="1">
                 <a:solidFill>
                   <a:srgbClr val="131A19"/>
                 </a:solidFill>
@@ -4698,14 +4370,14 @@
       </p:sp>
       <p:sp>
         <p:nvSpPr>
-          <p:cNvPr id="34" name="TextBox 33"/>
+          <p:cNvPr id="19" name="TextBox 18"/>
           <p:cNvSpPr txBox="1"/>
           <p:nvPr/>
         </p:nvSpPr>
         <p:spPr>
           <a:xfrm>
-            <a:off x="8394192" y="2359152"/>
-            <a:ext cx="3154680" cy="274320"/>
+            <a:off x="8375904" y="2724911"/>
+            <a:ext cx="3172968" cy="219456"/>
           </a:xfrm>
           <a:prstGeom prst="rect">
             <a:avLst/>
@@ -4724,7 +4396,7 @@
               </a:lnSpc>
             </a:pPr>
             <a:r>
-              <a:rPr sz="1100" b="0">
+              <a:rPr sz="1000" b="0">
                 <a:solidFill>
                   <a:srgbClr val="66756F"/>
                 </a:solidFill>
@@ -4737,14 +4409,14 @@
       </p:sp>
       <p:sp>
         <p:nvSpPr>
-          <p:cNvPr id="35" name="TextBox 34"/>
+          <p:cNvPr id="20" name="TextBox 19"/>
           <p:cNvSpPr txBox="1"/>
           <p:nvPr/>
         </p:nvSpPr>
         <p:spPr>
           <a:xfrm>
-            <a:off x="8394192" y="2724912"/>
-            <a:ext cx="3154680" cy="310896"/>
+            <a:off x="8375904" y="2999231"/>
+            <a:ext cx="3172968" cy="3063240"/>
           </a:xfrm>
           <a:prstGeom prst="rect">
             <a:avLst/>
@@ -4757,459 +4429,343 @@
           </a:bodyPr>
           <a:lstStyle/>
           <a:p>
-            <a:pPr algn="l">
-              <a:lnSpc>
-                <a:spcPct val="112000"/>
-              </a:lnSpc>
-            </a:pPr>
-            <a:r>
-              <a:rPr sz="1050" b="0">
-                <a:solidFill>
-                  <a:srgbClr val="131A19"/>
+            <a:pPr>
+              <a:lnSpc>
+                <a:spcPct val="122000"/>
+              </a:lnSpc>
+              <a:spcBef>
+                <a:spcPts val="200"/>
+              </a:spcBef>
+            </a:pPr>
+            <a:r>
+              <a:rPr sz="950" b="0">
+                <a:solidFill>
+                  <a:srgbClr val="3C4947"/>
                 </a:solidFill>
                 <a:latin typeface="Consolas"/>
               </a:rPr>
-              <a:t>Charbonnier √(e²+ε²)</a:t>
-            </a:r>
-          </a:p>
-          <a:p>
-            <a:pPr algn="l">
-              <a:lnSpc>
-                <a:spcPct val="112000"/>
-              </a:lnSpc>
-            </a:pPr>
-            <a:r>
-              <a:rPr sz="1050" b="0">
+              <a:t>Charbonnier √(e²+ε²) · AdamW 2e-4 · cosine</a:t>
+            </a:r>
+          </a:p>
+          <a:p>
+            <a:pPr>
+              <a:lnSpc>
+                <a:spcPct val="122000"/>
+              </a:lnSpc>
+              <a:spcBef>
+                <a:spcPts val="200"/>
+              </a:spcBef>
+            </a:pPr>
+            <a:r>
+              <a:rPr sz="950" b="0">
                 <a:solidFill>
                   <a:srgbClr val="3C4947"/>
                 </a:solidFill>
+                <a:latin typeface="Consolas"/>
+              </a:rPr>
+              <a:t>bf16 · clip 1.0 · batch 8 · 256² 통째로</a:t>
+            </a:r>
+          </a:p>
+          <a:p>
+            <a:pPr>
+              <a:lnSpc>
+                <a:spcPct val="122000"/>
+              </a:lnSpc>
+              <a:spcBef>
+                <a:spcPts val="0"/>
+              </a:spcBef>
+            </a:pPr>
+            <a:r>
+              <a:rPr sz="600"/>
+              <a:t/>
+            </a:r>
+          </a:p>
+          <a:p>
+            <a:pPr>
+              <a:lnSpc>
+                <a:spcPct val="122000"/>
+              </a:lnSpc>
+              <a:spcBef>
+                <a:spcPts val="200"/>
+              </a:spcBef>
+            </a:pPr>
+            <a:r>
+              <a:rPr sz="950" b="1">
+                <a:solidFill>
+                  <a:srgbClr val="3C4947"/>
+                </a:solidFill>
                 <a:latin typeface="맑은 고딕"/>
               </a:rPr>
-              <a:t> · AdamW 2e-4 · cosine</a:t>
-            </a:r>
-          </a:p>
-        </p:txBody>
-      </p:sp>
-      <p:sp>
-        <p:nvSpPr>
-          <p:cNvPr id="36" name="TextBox 35"/>
-          <p:cNvSpPr txBox="1"/>
-          <p:nvPr/>
-        </p:nvSpPr>
-        <p:spPr>
-          <a:xfrm>
-            <a:off x="8394192" y="3063240"/>
-            <a:ext cx="3154680" cy="310896"/>
-          </a:xfrm>
-          <a:prstGeom prst="rect">
-            <a:avLst/>
-          </a:prstGeom>
-          <a:noFill/>
-        </p:spPr>
-        <p:txBody>
-          <a:bodyPr wrap="square" anchor="t">
-            <a:spAutoFit/>
-          </a:bodyPr>
-          <a:lstStyle/>
-          <a:p>
-            <a:pPr algn="l">
-              <a:lnSpc>
-                <a:spcPct val="112000"/>
-              </a:lnSpc>
-            </a:pPr>
-            <a:r>
-              <a:rPr sz="1050" b="0">
+              <a:t>λ 도 학습한다</a:t>
+            </a:r>
+            <a:r>
+              <a:rPr sz="950" b="0">
                 <a:solidFill>
                   <a:srgbClr val="3C4947"/>
                 </a:solidFill>
                 <a:latin typeface="맑은 고딕"/>
               </a:rPr>
-              <a:t>bf16 · clip 1.0 · batch 8 · 256² 통째로</a:t>
-            </a:r>
-          </a:p>
-        </p:txBody>
-      </p:sp>
-      <p:sp>
-        <p:nvSpPr>
-          <p:cNvPr id="37" name="TextBox 36"/>
-          <p:cNvSpPr txBox="1"/>
-          <p:nvPr/>
-        </p:nvSpPr>
-        <p:spPr>
-          <a:xfrm>
-            <a:off x="8394192" y="3511296"/>
-            <a:ext cx="3154680" cy="310896"/>
-          </a:xfrm>
-          <a:prstGeom prst="rect">
-            <a:avLst/>
-          </a:prstGeom>
-          <a:noFill/>
-        </p:spPr>
-        <p:txBody>
-          <a:bodyPr wrap="square" anchor="t">
-            <a:spAutoFit/>
-          </a:bodyPr>
-          <a:lstStyle/>
-          <a:p>
-            <a:pPr algn="l">
-              <a:lnSpc>
-                <a:spcPct val="112000"/>
-              </a:lnSpc>
-            </a:pPr>
-            <a:r>
-              <a:rPr sz="1050" b="1">
-                <a:solidFill>
-                  <a:srgbClr val="131A19"/>
+              <a:t> (log 로 저장, 단계마다 따로)</a:t>
+            </a:r>
+          </a:p>
+          <a:p>
+            <a:pPr>
+              <a:lnSpc>
+                <a:spcPct val="122000"/>
+              </a:lnSpc>
+              <a:spcBef>
+                <a:spcPts val="200"/>
+              </a:spcBef>
+            </a:pPr>
+            <a:r>
+              <a:rPr sz="950" b="0">
+                <a:solidFill>
+                  <a:srgbClr val="66756F"/>
                 </a:solidFill>
                 <a:latin typeface="맑은 고딕"/>
               </a:rPr>
-              <a:t>λ 도 학습한다</a:t>
-            </a:r>
-          </a:p>
-          <a:p>
-            <a:pPr algn="l">
-              <a:lnSpc>
-                <a:spcPct val="112000"/>
-              </a:lnSpc>
-            </a:pPr>
-            <a:r>
-              <a:rPr sz="1050" b="0">
+              <a:t>초기값은 Wiener 최적값을 재서 → 시작이 10.19 가 아닌 14.05 dB</a:t>
+            </a:r>
+          </a:p>
+          <a:p>
+            <a:pPr>
+              <a:lnSpc>
+                <a:spcPct val="122000"/>
+              </a:lnSpc>
+              <a:spcBef>
+                <a:spcPts val="0"/>
+              </a:spcBef>
+            </a:pPr>
+            <a:r>
+              <a:rPr sz="600"/>
+              <a:t/>
+            </a:r>
+          </a:p>
+          <a:p>
+            <a:pPr>
+              <a:lnSpc>
+                <a:spcPct val="122000"/>
+              </a:lnSpc>
+              <a:spcBef>
+                <a:spcPts val="200"/>
+              </a:spcBef>
+            </a:pPr>
+            <a:r>
+              <a:rPr sz="950" b="1">
+                <a:solidFill>
+                  <a:srgbClr val="0B6E5E"/>
+                </a:solidFill>
+                <a:latin typeface="맑은 고딕"/>
+              </a:rPr>
+              <a:t>best epoch 이 세 번 연속 마지막</a:t>
+            </a:r>
+          </a:p>
+          <a:p>
+            <a:pPr>
+              <a:lnSpc>
+                <a:spcPct val="122000"/>
+              </a:lnSpc>
+              <a:spcBef>
+                <a:spcPts val="200"/>
+              </a:spcBef>
+            </a:pPr>
+            <a:r>
+              <a:rPr sz="950" b="0">
+                <a:solidFill>
+                  <a:srgbClr val="66756F"/>
+                </a:solidFill>
+                <a:latin typeface="맑은 고딕"/>
+              </a:rPr>
+              <a:t>아직 수렴 전이었다. 이어 돌린 것이 점수를 가장 많이 올렸다</a:t>
+            </a:r>
+          </a:p>
+          <a:p>
+            <a:pPr>
+              <a:lnSpc>
+                <a:spcPct val="122000"/>
+              </a:lnSpc>
+              <a:spcBef>
+                <a:spcPts val="0"/>
+              </a:spcBef>
+            </a:pPr>
+            <a:r>
+              <a:rPr sz="600"/>
+              <a:t/>
+            </a:r>
+          </a:p>
+          <a:p>
+            <a:pPr>
+              <a:lnSpc>
+                <a:spcPct val="122000"/>
+              </a:lnSpc>
+              <a:spcBef>
+                <a:spcPts val="200"/>
+              </a:spcBef>
+            </a:pPr>
+            <a:r>
+              <a:rPr sz="950" b="1">
                 <a:solidFill>
                   <a:srgbClr val="3C4947"/>
                 </a:solidFill>
                 <a:latin typeface="맑은 고딕"/>
               </a:rPr>
-              <a:t> (log 로 저장, 단계마다 따로)</a:t>
-            </a:r>
-          </a:p>
-        </p:txBody>
-      </p:sp>
-      <p:sp>
-        <p:nvSpPr>
-          <p:cNvPr id="38" name="TextBox 37"/>
-          <p:cNvSpPr txBox="1"/>
-          <p:nvPr/>
-        </p:nvSpPr>
-        <p:spPr>
-          <a:xfrm>
-            <a:off x="8394192" y="3680460"/>
-            <a:ext cx="3154680" cy="310896"/>
-          </a:xfrm>
-          <a:prstGeom prst="rect">
-            <a:avLst/>
-          </a:prstGeom>
-          <a:noFill/>
-        </p:spPr>
-        <p:txBody>
-          <a:bodyPr wrap="square" anchor="t">
-            <a:spAutoFit/>
-          </a:bodyPr>
-          <a:lstStyle/>
-          <a:p>
-            <a:pPr algn="l">
-              <a:lnSpc>
-                <a:spcPct val="112000"/>
-              </a:lnSpc>
-            </a:pPr>
-            <a:r>
-              <a:rPr sz="1050" b="0">
+              <a:t>SSIM loss 는 처음부터 쓰면 나빠진다</a:t>
+            </a:r>
+            <a:r>
+              <a:rPr sz="950" b="0">
                 <a:solidFill>
                   <a:srgbClr val="3C4947"/>
                 </a:solidFill>
                 <a:latin typeface="맑은 고딕"/>
               </a:rPr>
-              <a:t>초기값은 Wiener 최적값을 재서 → 시작이 </a:t>
-            </a:r>
-          </a:p>
-          <a:p>
-            <a:pPr algn="l">
-              <a:lnSpc>
-                <a:spcPct val="112000"/>
-              </a:lnSpc>
-            </a:pPr>
-            <a:r>
-              <a:rPr sz="1050" b="1">
-                <a:solidFill>
-                  <a:srgbClr val="131A19"/>
+              <a:t> (18.73 → 17.53)</a:t>
+            </a:r>
+          </a:p>
+          <a:p>
+            <a:pPr>
+              <a:lnSpc>
+                <a:spcPct val="122000"/>
+              </a:lnSpc>
+              <a:spcBef>
+                <a:spcPts val="200"/>
+              </a:spcBef>
+            </a:pPr>
+            <a:r>
+              <a:rPr sz="950" b="0">
+                <a:solidFill>
+                  <a:srgbClr val="66756F"/>
                 </a:solidFill>
                 <a:latin typeface="맑은 고딕"/>
               </a:rPr>
-              <a:t>14.05 dB</a:t>
-            </a:r>
-          </a:p>
-          <a:p>
-            <a:pPr algn="l">
-              <a:lnSpc>
-                <a:spcPct val="112000"/>
-              </a:lnSpc>
-            </a:pPr>
-            <a:r>
-              <a:rPr sz="1050" b="0">
+              <a:t>정확한 모델에서 미세조정으로만</a:t>
+            </a:r>
+          </a:p>
+          <a:p>
+            <a:pPr>
+              <a:lnSpc>
+                <a:spcPct val="122000"/>
+              </a:lnSpc>
+              <a:spcBef>
+                <a:spcPts val="0"/>
+              </a:spcBef>
+            </a:pPr>
+            <a:r>
+              <a:rPr sz="600"/>
+              <a:t/>
+            </a:r>
+          </a:p>
+          <a:p>
+            <a:pPr>
+              <a:lnSpc>
+                <a:spcPct val="122000"/>
+              </a:lnSpc>
+              <a:spcBef>
+                <a:spcPts val="200"/>
+              </a:spcBef>
+            </a:pPr>
+            <a:r>
+              <a:rPr sz="950" b="0">
                 <a:solidFill>
                   <a:srgbClr val="3C4947"/>
                 </a:solidFill>
                 <a:latin typeface="맑은 고딕"/>
               </a:rPr>
-              <a:t> (아니면 10.19)</a:t>
-            </a:r>
-          </a:p>
-        </p:txBody>
-      </p:sp>
-      <p:sp>
-        <p:nvSpPr>
-          <p:cNvPr id="39" name="TextBox 38"/>
-          <p:cNvSpPr txBox="1"/>
-          <p:nvPr/>
-        </p:nvSpPr>
-        <p:spPr>
-          <a:xfrm>
-            <a:off x="8394192" y="4128516"/>
-            <a:ext cx="3154680" cy="310896"/>
-          </a:xfrm>
-          <a:prstGeom prst="rect">
-            <a:avLst/>
-          </a:prstGeom>
-          <a:noFill/>
-        </p:spPr>
-        <p:txBody>
-          <a:bodyPr wrap="square" anchor="t">
-            <a:spAutoFit/>
-          </a:bodyPr>
-          <a:lstStyle/>
-          <a:p>
-            <a:pPr algn="l">
-              <a:lnSpc>
-                <a:spcPct val="112000"/>
-              </a:lnSpc>
-            </a:pPr>
-            <a:r>
-              <a:rPr sz="1050" b="1">
+              <a:t>추론에 </a:t>
+            </a:r>
+            <a:r>
+              <a:rPr sz="950" b="1">
+                <a:solidFill>
+                  <a:srgbClr val="3C4947"/>
+                </a:solidFill>
+                <a:latin typeface="맑은 고딕"/>
+              </a:rPr>
+              <a:t>16× self-ensemble</a:t>
+            </a:r>
+            <a:r>
+              <a:rPr sz="950" b="0">
+                <a:solidFill>
+                  <a:srgbClr val="3C4947"/>
+                </a:solidFill>
+                <a:latin typeface="맑은 고딕"/>
+              </a:rPr>
+              <a:t> — 뒤집기·180°·대각 순환이동</a:t>
+            </a:r>
+          </a:p>
+          <a:p>
+            <a:pPr>
+              <a:lnSpc>
+                <a:spcPct val="122000"/>
+              </a:lnSpc>
+              <a:spcBef>
+                <a:spcPts val="200"/>
+              </a:spcBef>
+            </a:pPr>
+            <a:r>
+              <a:rPr sz="950" b="0">
+                <a:solidFill>
+                  <a:srgbClr val="66756F"/>
+                </a:solidFill>
+                <a:latin typeface="맑은 고딕"/>
+              </a:rPr>
+              <a:t>dipole 과 교환되는 변환만 (오차 7e-16)</a:t>
+            </a:r>
+          </a:p>
+          <a:p>
+            <a:pPr>
+              <a:lnSpc>
+                <a:spcPct val="122000"/>
+              </a:lnSpc>
+              <a:spcBef>
+                <a:spcPts val="0"/>
+              </a:spcBef>
+            </a:pPr>
+            <a:r>
+              <a:rPr sz="600"/>
+              <a:t/>
+            </a:r>
+          </a:p>
+          <a:p>
+            <a:pPr>
+              <a:lnSpc>
+                <a:spcPct val="122000"/>
+              </a:lnSpc>
+              <a:spcBef>
+                <a:spcPts val="200"/>
+              </a:spcBef>
+            </a:pPr>
+            <a:r>
+              <a:rPr sz="950" b="0">
+                <a:solidFill>
+                  <a:srgbClr val="3C4947"/>
+                </a:solidFill>
+                <a:latin typeface="맑은 고딕"/>
+              </a:rPr>
+              <a:t>모델은 </a:t>
+            </a:r>
+            <a:r>
+              <a:rPr sz="950" b="1">
                 <a:solidFill>
                   <a:srgbClr val="0B6E5E"/>
                 </a:solidFill>
                 <a:latin typeface="맑은 고딕"/>
               </a:rPr>
-              <a:t>best epoch 이 세 번 연속 마지막</a:t>
-            </a:r>
-          </a:p>
-          <a:p>
-            <a:pPr algn="l">
-              <a:lnSpc>
-                <a:spcPct val="112000"/>
-              </a:lnSpc>
-            </a:pPr>
-            <a:r>
-              <a:rPr sz="1050" b="0">
+              <a:t>val 100장</a:t>
+            </a:r>
+            <a:r>
+              <a:rPr sz="950" b="0">
                 <a:solidFill>
                   <a:srgbClr val="3C4947"/>
                 </a:solidFill>
                 <a:latin typeface="맑은 고딕"/>
               </a:rPr>
-              <a:t> — 수렴 전이었다. 이어 돌린 것이 점수를 가장 많이 올렸다</a:t>
-            </a:r>
-          </a:p>
-        </p:txBody>
-      </p:sp>
-      <p:sp>
-        <p:nvSpPr>
-          <p:cNvPr id="40" name="TextBox 39"/>
-          <p:cNvSpPr txBox="1"/>
-          <p:nvPr/>
-        </p:nvSpPr>
-        <p:spPr>
-          <a:xfrm>
-            <a:off x="8394192" y="4576572"/>
-            <a:ext cx="3154680" cy="310896"/>
-          </a:xfrm>
-          <a:prstGeom prst="rect">
-            <a:avLst/>
-          </a:prstGeom>
-          <a:noFill/>
-        </p:spPr>
-        <p:txBody>
-          <a:bodyPr wrap="square" anchor="t">
-            <a:spAutoFit/>
-          </a:bodyPr>
-          <a:lstStyle/>
-          <a:p>
-            <a:pPr algn="l">
-              <a:lnSpc>
-                <a:spcPct val="112000"/>
-              </a:lnSpc>
-            </a:pPr>
-            <a:r>
-              <a:rPr sz="1050" b="1">
-                <a:solidFill>
-                  <a:srgbClr val="131A19"/>
-                </a:solidFill>
-                <a:latin typeface="맑은 고딕"/>
-              </a:rPr>
-              <a:t>SSIM loss 는 처음부터 쓰면 나빠진다</a:t>
-            </a:r>
-          </a:p>
-          <a:p>
-            <a:pPr algn="l">
-              <a:lnSpc>
-                <a:spcPct val="112000"/>
-              </a:lnSpc>
-            </a:pPr>
-            <a:r>
-              <a:rPr sz="1050" b="0">
-                <a:solidFill>
-                  <a:srgbClr val="3C4947"/>
-                </a:solidFill>
-                <a:latin typeface="맑은 고딕"/>
-              </a:rPr>
-              <a:t> (18.73→17.53). 미세조정으로만</a:t>
-            </a:r>
-          </a:p>
-        </p:txBody>
-      </p:sp>
-      <p:sp>
-        <p:nvSpPr>
-          <p:cNvPr id="41" name="TextBox 40"/>
-          <p:cNvSpPr txBox="1"/>
-          <p:nvPr/>
-        </p:nvSpPr>
-        <p:spPr>
-          <a:xfrm>
-            <a:off x="8394192" y="5024628"/>
-            <a:ext cx="3154680" cy="310896"/>
-          </a:xfrm>
-          <a:prstGeom prst="rect">
-            <a:avLst/>
-          </a:prstGeom>
-          <a:noFill/>
-        </p:spPr>
-        <p:txBody>
-          <a:bodyPr wrap="square" anchor="t">
-            <a:spAutoFit/>
-          </a:bodyPr>
-          <a:lstStyle/>
-          <a:p>
-            <a:pPr algn="l">
-              <a:lnSpc>
-                <a:spcPct val="112000"/>
-              </a:lnSpc>
-            </a:pPr>
-            <a:r>
-              <a:rPr sz="1050" b="0">
-                <a:solidFill>
-                  <a:srgbClr val="3C4947"/>
-                </a:solidFill>
-                <a:latin typeface="맑은 고딕"/>
-              </a:rPr>
-              <a:t>추론: </a:t>
-            </a:r>
-          </a:p>
-          <a:p>
-            <a:pPr algn="l">
-              <a:lnSpc>
-                <a:spcPct val="112000"/>
-              </a:lnSpc>
-            </a:pPr>
-            <a:r>
-              <a:rPr sz="1050" b="1">
-                <a:solidFill>
-                  <a:srgbClr val="131A19"/>
-                </a:solidFill>
-                <a:latin typeface="맑은 고딕"/>
-              </a:rPr>
-              <a:t>16× self-ensemble</a:t>
-            </a:r>
-          </a:p>
-          <a:p>
-            <a:pPr algn="l">
-              <a:lnSpc>
-                <a:spcPct val="112000"/>
-              </a:lnSpc>
-            </a:pPr>
-            <a:r>
-              <a:rPr sz="1050" b="0">
-                <a:solidFill>
-                  <a:srgbClr val="3C4947"/>
-                </a:solidFill>
-                <a:latin typeface="맑은 고딕"/>
-              </a:rPr>
-              <a:t> — 뒤집기·180°·대각 순환이동. dipole 과 교환되는 변환만 썼다</a:t>
-            </a:r>
-          </a:p>
-        </p:txBody>
-      </p:sp>
-      <p:sp>
-        <p:nvSpPr>
-          <p:cNvPr id="42" name="TextBox 41"/>
-          <p:cNvSpPr txBox="1"/>
-          <p:nvPr/>
-        </p:nvSpPr>
-        <p:spPr>
-          <a:xfrm>
-            <a:off x="8394192" y="5641848"/>
-            <a:ext cx="3154680" cy="310896"/>
-          </a:xfrm>
-          <a:prstGeom prst="rect">
-            <a:avLst/>
-          </a:prstGeom>
-          <a:noFill/>
-        </p:spPr>
-        <p:txBody>
-          <a:bodyPr wrap="square" anchor="t">
-            <a:spAutoFit/>
-          </a:bodyPr>
-          <a:lstStyle/>
-          <a:p>
-            <a:pPr algn="l">
-              <a:lnSpc>
-                <a:spcPct val="112000"/>
-              </a:lnSpc>
-            </a:pPr>
-            <a:r>
-              <a:rPr sz="1050" b="0">
-                <a:solidFill>
-                  <a:srgbClr val="3C4947"/>
-                </a:solidFill>
-                <a:latin typeface="맑은 고딕"/>
-              </a:rPr>
-              <a:t>모델은 </a:t>
-            </a:r>
-          </a:p>
-          <a:p>
-            <a:pPr algn="l">
-              <a:lnSpc>
-                <a:spcPct val="112000"/>
-              </a:lnSpc>
-            </a:pPr>
-            <a:r>
-              <a:rPr sz="1050" b="1">
-                <a:solidFill>
-                  <a:srgbClr val="0B6E5E"/>
-                </a:solidFill>
-                <a:latin typeface="맑은 고딕"/>
-              </a:rPr>
-              <a:t>val 100장</a:t>
-            </a:r>
-          </a:p>
-          <a:p>
-            <a:pPr algn="l">
-              <a:lnSpc>
-                <a:spcPct val="112000"/>
-              </a:lnSpc>
-            </a:pPr>
-            <a:r>
-              <a:rPr sz="1050" b="0">
-                <a:solidFill>
-                  <a:srgbClr val="3C4947"/>
-                </a:solidFill>
-                <a:latin typeface="맑은 고딕"/>
-              </a:rPr>
-              <a:t> 으로 골랐다 — test 로 고르면 test 를 쓴 것이다</a:t>
-            </a:r>
-          </a:p>
-        </p:txBody>
-      </p:sp>
-      <p:sp>
-        <p:nvSpPr>
-          <p:cNvPr id="43" name="TextBox 42"/>
+              <a:t> 으로 골랐다</a:t>
+            </a:r>
+          </a:p>
+        </p:txBody>
+      </p:sp>
+      <p:sp>
+        <p:nvSpPr>
+          <p:cNvPr id="21" name="TextBox 20"/>
           <p:cNvSpPr txBox="1"/>
           <p:nvPr/>
         </p:nvSpPr>
